--- a/public/manuali/manuale-design-case-studies.pptx
+++ b/public/manuali/manuale-design-case-studies.pptx
@@ -2673,7 +2673,7 @@
                 <a:ea typeface="Calibri" pitchFamily="34" charset="-122"/>
                 <a:cs typeface="Calibri" pitchFamily="34" charset="-120"/>
               </a:rPr>
-              <a:t>Nella scheda “Elenco &amp; Modifiche” trovate tutte le consegne, la vostra compresa.</a:t>
+              <a:t>Con il team loggato, la scheda si chiama “Le tue Schede” e mostra solo le vostre consegne.</a:t>
             </a:r>
             <a:endParaRPr lang="en-US" sz="1350" dirty="0"/>
           </a:p>
@@ -2694,7 +2694,7 @@
                 <a:ea typeface="Calibri" pitchFamily="34" charset="-122"/>
                 <a:cs typeface="Calibri" pitchFamily="34" charset="-120"/>
               </a:rPr>
-              <a:t>Premendo “Modifica” vi verrà chiesto subito il codice di gruppo: se è corretto, potete cambiare qualsiasi campo.</a:t>
+              <a:t>Con il team loggato, “Modifica” ed “Elimina” funzionano subito, senza chiedere alcun codice.</a:t>
             </a:r>
             <a:endParaRPr lang="en-US" sz="1350" dirty="0"/>
           </a:p>
@@ -2715,7 +2715,7 @@
                 <a:ea typeface="Calibri" pitchFamily="34" charset="-122"/>
                 <a:cs typeface="Calibri" pitchFamily="34" charset="-120"/>
               </a:rPr>
-              <a:t>Premendo “Elimina” (richiede sempre il codice) la scheda viene rimossa definitivamente.</a:t>
+              <a:t>Senza login di team (accesso diretto), l’elenco mostra invece tutte le consegne con un filtro per numero di gruppo, e modificare o cancellare richiede sempre il codice scelto alla creazione.</a:t>
             </a:r>
             <a:endParaRPr lang="en-US" sz="1350" dirty="0"/>
           </a:p>
@@ -2736,7 +2736,7 @@
                 <a:ea typeface="Calibri" pitchFamily="34" charset="-122"/>
                 <a:cs typeface="Calibri" pitchFamily="34" charset="-120"/>
               </a:rPr>
-              <a:t>Codice dimenticato? Chiedete al/alla docente: può impostarvene uno nuovo dal proprio pannello di controllo.</a:t>
+              <a:t>Codice dimenticato (accesso diretto)? Chiedete al/alla docente: può impostarvene uno nuovo dal proprio pannello di controllo.</a:t>
             </a:r>
             <a:endParaRPr lang="en-US" sz="1350" dirty="0"/>
           </a:p>
@@ -2750,8 +2750,8 @@
         </p:nvSpPr>
         <p:spPr>
           <a:xfrm>
-            <a:off x="6909206" y="630936"/>
-            <a:ext cx="4103827" cy="5458968"/>
+            <a:off x="6306256" y="1612848"/>
+            <a:ext cx="5309728" cy="3495145"/>
           </a:xfrm>
           <a:prstGeom prst="roundRect">
             <a:avLst>
@@ -2792,8 +2792,8 @@
         </p:blipFill>
         <p:spPr>
           <a:xfrm>
-            <a:off x="6964070" y="685800"/>
-            <a:ext cx="3994099" cy="5349240"/>
+            <a:off x="6361120" y="1667712"/>
+            <a:ext cx="5200000" cy="3385417"/>
           </a:xfrm>
           <a:prstGeom prst="rect">
             <a:avLst/>
@@ -2833,7 +2833,7 @@
                 <a:ea typeface="Calibri" pitchFamily="34" charset="-122"/>
                 <a:cs typeface="Calibri" pitchFamily="34" charset="-120"/>
               </a:rPr>
-              <a:t>L’elenco di tutte le consegne</a:t>
+              <a:t>Le vostre schede, già pronte da modificare</a:t>
             </a:r>
             <a:endParaRPr lang="en-US" sz="1050" dirty="0"/>
           </a:p>
@@ -3447,7 +3447,7 @@
                 <a:ea typeface="Calibri" pitchFamily="34" charset="-122"/>
                 <a:cs typeface="Calibri" pitchFamily="34" charset="-120"/>
               </a:rPr>
-              <a:t>Il progetto convince: idea chiara, driver coerenti tra loro.</a:t>
+              <a:t>Il caso studio convince: idea chiara, driver coerenti tra loro.</a:t>
             </a:r>
             <a:endParaRPr lang="en-US" sz="1200" dirty="0"/>
           </a:p>
@@ -3968,7 +3968,7 @@
                 <a:ea typeface="Cambria" pitchFamily="34" charset="-122"/>
                 <a:cs typeface="Cambria" pitchFamily="34" charset="-120"/>
               </a:rPr>
-              <a:t>Il vostro numero gruppo</a:t>
+              <a:t>Chi sta votando</a:t>
             </a:r>
             <a:endParaRPr lang="en-US" sz="2500" dirty="0"/>
           </a:p>
@@ -4010,7 +4010,7 @@
                 <a:ea typeface="Calibri" pitchFamily="34" charset="-122"/>
                 <a:cs typeface="Calibri" pitchFamily="34" charset="-120"/>
               </a:rPr>
-              <a:t>Prima di poter votare, identificate il vostro gruppo.</a:t>
+              <a:t>Con il team già loggato, il sistema sa già chi siete.</a:t>
             </a:r>
             <a:endParaRPr lang="en-US" sz="1300" dirty="0"/>
           </a:p>
@@ -4074,7 +4074,7 @@
                 <a:ea typeface="Calibri" pitchFamily="34" charset="-122"/>
                 <a:cs typeface="Calibri" pitchFamily="34" charset="-120"/>
               </a:rPr>
-              <a:t>Inserite il numero del vostro gruppo: è lo stesso numero usato per la vostra consegna.</a:t>
+              <a:t>Vedrete subito “Votate come Gruppo N — Nome”, senza dover inserire nulla.</a:t>
             </a:r>
             <a:endParaRPr lang="en-US" sz="1350" dirty="0"/>
           </a:p>
@@ -4095,7 +4095,7 @@
                 <a:ea typeface="Calibri" pitchFamily="34" charset="-122"/>
                 <a:cs typeface="Calibri" pitchFamily="34" charset="-120"/>
               </a:rPr>
-              <a:t>Se non c’è ancora nessuna votazione attiva, vedrete un messaggio di attesa: il/la docente deve prima aprire il voto su un caso studio.</a:t>
+              <a:t>Con l’accesso diretto (nessun team), inserite invece il numero del vostro gruppo a mano, come in precedenza.</a:t>
             </a:r>
             <a:endParaRPr lang="en-US" sz="1350" dirty="0"/>
           </a:p>
@@ -4109,8 +4109,8 @@
         </p:nvSpPr>
         <p:spPr>
           <a:xfrm>
-            <a:off x="7166329" y="630936"/>
-            <a:ext cx="3589582" cy="5458968"/>
+            <a:off x="6306256" y="1951390"/>
+            <a:ext cx="5309728" cy="2818061"/>
           </a:xfrm>
           <a:prstGeom prst="roundRect">
             <a:avLst>
@@ -4151,8 +4151,8 @@
         </p:blipFill>
         <p:spPr>
           <a:xfrm>
-            <a:off x="7221193" y="685800"/>
-            <a:ext cx="3479854" cy="5349240"/>
+            <a:off x="6361120" y="2006254"/>
+            <a:ext cx="5200000" cy="2708333"/>
           </a:xfrm>
           <a:prstGeom prst="rect">
             <a:avLst/>
@@ -4192,7 +4192,7 @@
                 <a:ea typeface="Calibri" pitchFamily="34" charset="-122"/>
                 <a:cs typeface="Calibri" pitchFamily="34" charset="-120"/>
               </a:rPr>
-              <a:t>In attesa che il/la docente apra una votazione</a:t>
+              <a:t>Identità riconosciuta automaticamente dal team</a:t>
             </a:r>
             <a:endParaRPr lang="en-US" sz="1050" dirty="0"/>
           </a:p>
@@ -4524,7 +4524,7 @@
                 <a:ea typeface="Calibri" pitchFamily="34" charset="-122"/>
                 <a:cs typeface="Calibri" pitchFamily="34" charset="-120"/>
               </a:rPr>
-              <a:t>Descrizione e tag del progetto in votazione.</a:t>
+              <a:t>Descrizione e tag del caso studio in votazione.</a:t>
             </a:r>
             <a:endParaRPr lang="en-US" sz="1350" dirty="0"/>
           </a:p>
@@ -4601,8 +4601,8 @@
         </p:nvSpPr>
         <p:spPr>
           <a:xfrm>
-            <a:off x="7166329" y="630936"/>
-            <a:ext cx="3589582" cy="5458968"/>
+            <a:off x="6845967" y="630936"/>
+            <a:ext cx="4230306" cy="5458968"/>
           </a:xfrm>
           <a:prstGeom prst="roundRect">
             <a:avLst>
@@ -4643,8 +4643,8 @@
         </p:blipFill>
         <p:spPr>
           <a:xfrm>
-            <a:off x="7221193" y="685800"/>
-            <a:ext cx="3479854" cy="5349240"/>
+            <a:off x="6900831" y="685800"/>
+            <a:ext cx="4120578" cy="5349240"/>
           </a:xfrm>
           <a:prstGeom prst="rect">
             <a:avLst/>
@@ -5093,8 +5093,8 @@
         </p:nvSpPr>
         <p:spPr>
           <a:xfrm>
-            <a:off x="7218608" y="630936"/>
-            <a:ext cx="3485023" cy="5458968"/>
+            <a:off x="6910038" y="630936"/>
+            <a:ext cx="4102164" cy="5458968"/>
           </a:xfrm>
           <a:prstGeom prst="roundRect">
             <a:avLst>
@@ -5135,8 +5135,8 @@
         </p:blipFill>
         <p:spPr>
           <a:xfrm>
-            <a:off x="7273472" y="685800"/>
-            <a:ext cx="3375295" cy="5349240"/>
+            <a:off x="6964902" y="685800"/>
+            <a:ext cx="3992436" cy="5349240"/>
           </a:xfrm>
           <a:prstGeom prst="rect">
             <a:avLst/>
@@ -5428,7 +5428,7 @@
                 <a:ea typeface="Calibri" pitchFamily="34" charset="-122"/>
                 <a:cs typeface="Calibri" pitchFamily="34" charset="-120"/>
               </a:rPr>
-              <a:t>Chiedete al/alla docente: può impostarne uno nuovo dal proprio pannello di controllo.</a:t>
+              <a:t>Per il codice di gruppo (accesso diretto), chiedete al/alla docente. Per la password del team, usate “Password dimenticata?” nella schermata di accesso.</a:t>
             </a:r>
             <a:endParaRPr lang="en-US" sz="1250" dirty="0"/>
           </a:p>
@@ -5531,7 +5531,7 @@
                 <a:ea typeface="Calibri" pitchFamily="34" charset="-122"/>
                 <a:cs typeface="Calibri" pitchFamily="34" charset="-120"/>
               </a:rPr>
-              <a:t>Sì, in qualsiasi momento, inserendo il vostro codice di gruppo in “Elenco &amp; Modifiche”.</a:t>
+              <a:t>Sì, sempre. Con il team loggato basta aprirla da “Le tue Schede”; senza login, da “Elenco &amp; Modifiche” con il codice di gruppo.</a:t>
             </a:r>
             <a:endParaRPr lang="en-US" sz="1250" dirty="0"/>
           </a:p>
@@ -5737,7 +5737,7 @@
                 <a:ea typeface="Calibri" pitchFamily="34" charset="-122"/>
                 <a:cs typeface="Calibri" pitchFamily="34" charset="-120"/>
               </a:rPr>
-              <a:t>Sì, dalla stessa schermata, inserendo di nuovo il codice di gruppo. L’azione non è reversibile.</a:t>
+              <a:t>Sì. Con il team loggato basta premere “Elimina”; senza login serve il codice di gruppo. L’azione non è reversibile.</a:t>
             </a:r>
             <a:endParaRPr lang="en-US" sz="1250" dirty="0"/>
           </a:p>
@@ -6083,7 +6083,7 @@
                 <a:ea typeface="Calibri" pitchFamily="34" charset="-122"/>
                 <a:cs typeface="Calibri" pitchFamily="34" charset="-120"/>
               </a:rPr>
-              <a:t>Il percorso in 5 passaggi per inviare la vostra consegna: gruppo, progetto, temi, valutazione e riepilogo.</a:t>
+              <a:t>Il percorso guidato per inviare la vostra consegna: caso studio, temi, valutazione e riepilogo (più il gruppo, se non siete già loggati come team).</a:t>
             </a:r>
             <a:endParaRPr lang="en-US" sz="1400" dirty="0"/>
           </a:p>
@@ -6260,7 +6260,7 @@
                 <a:ea typeface="Calibri" pitchFamily="34" charset="-122"/>
                 <a:cs typeface="Calibri" pitchFamily="34" charset="-120"/>
               </a:rPr>
-              <a:t>Come assegnare il vostro cartellino durante la peer review, leggendo prima i dettagli di ogni progetto.</a:t>
+              <a:t>Come assegnare il vostro cartellino durante la peer review, leggendo prima i dettagli di ogni caso studio.</a:t>
             </a:r>
             <a:endParaRPr lang="en-US" sz="1400" dirty="0"/>
           </a:p>
@@ -6546,7 +6546,7 @@
                 <a:ea typeface="Calibri" pitchFamily="34" charset="-122"/>
                 <a:cs typeface="Calibri" pitchFamily="34" charset="-120"/>
               </a:rPr>
-              <a:t>Il percorso guidato in 5 passaggi, dalla creazione del gruppo all’invio finale.</a:t>
+              <a:t>Il percorso guidato per raccontare e valutare un caso studio, dal login del team all’invio finale.</a:t>
             </a:r>
             <a:endParaRPr lang="en-US" sz="1500" dirty="0"/>
           </a:p>
@@ -6871,7 +6871,7 @@
                 <a:ea typeface="Calibri" pitchFamily="34" charset="-122"/>
                 <a:cs typeface="Calibri" pitchFamily="34" charset="-120"/>
               </a:rPr>
-              <a:t>Nome, numero e un codice segreto</a:t>
+              <a:t>Nome, numero e codice — saltati se il team è già loggato</a:t>
             </a:r>
             <a:endParaRPr lang="en-US" sz="1100" dirty="0"/>
           </a:p>
@@ -7008,7 +7008,7 @@
                 <a:ea typeface="Cambria" pitchFamily="34" charset="-122"/>
                 <a:cs typeface="Cambria" pitchFamily="34" charset="-120"/>
               </a:rPr>
-              <a:t>Il Progetto</a:t>
+              <a:t>Il Caso Studio</a:t>
             </a:r>
             <a:endParaRPr lang="en-US" sz="1500" dirty="0"/>
           </a:p>
@@ -7399,7 +7399,7 @@
                 <a:ea typeface="Calibri" pitchFamily="34" charset="-122"/>
                 <a:cs typeface="Calibri" pitchFamily="34" charset="-120"/>
               </a:rPr>
-              <a:t>I 4 driver, da 0 a 5, con motivazione</a:t>
+              <a:t>I 4 driver, da 0 a 5, con un commento</a:t>
             </a:r>
             <a:endParaRPr lang="en-US" sz="1100" dirty="0"/>
           </a:p>
@@ -7655,7 +7655,7 @@
                 <a:ea typeface="Calibri" pitchFamily="34" charset="-122"/>
                 <a:cs typeface="Calibri" pitchFamily="34" charset="-120"/>
               </a:rPr>
-              <a:t>ogni passaggio si sblocca solo dopo aver completato quello precedente. La barra in alto mostra sempre dove vi trovate.</a:t>
+              <a:t>ogni passaggio si sblocca solo dopo aver completato quello precedente, e con un team già loggato il passo “Il Gruppo” non compare affatto.</a:t>
             </a:r>
             <a:endParaRPr lang="en-US" sz="1300" dirty="0"/>
           </a:p>
@@ -7944,7 +7944,7 @@
                 <a:ea typeface="Calibri" pitchFamily="34" charset="-122"/>
                 <a:cs typeface="Calibri" pitchFamily="34" charset="-120"/>
               </a:rPr>
-              <a:t>Chi siete, e come dimostrerete in futuro che questa scheda è vostra.</a:t>
+              <a:t>Se il team non è già loggato, iniziate qui: chi siete e come dimostrerete in futuro che questa scheda è vostra.</a:t>
             </a:r>
             <a:endParaRPr lang="en-US" sz="1300" dirty="0"/>
           </a:p>
@@ -8064,8 +8064,8 @@
         </p:nvSpPr>
         <p:spPr>
           <a:xfrm>
-            <a:off x="6909206" y="630936"/>
-            <a:ext cx="4103827" cy="5458968"/>
+            <a:off x="6306256" y="861285"/>
+            <a:ext cx="5309728" cy="4998270"/>
           </a:xfrm>
           <a:prstGeom prst="roundRect">
             <a:avLst>
@@ -8106,8 +8106,8 @@
         </p:blipFill>
         <p:spPr>
           <a:xfrm>
-            <a:off x="6964070" y="685800"/>
-            <a:ext cx="3994099" cy="5349240"/>
+            <a:off x="6361120" y="916149"/>
+            <a:ext cx="5200000" cy="4888542"/>
           </a:xfrm>
           <a:prstGeom prst="rect">
             <a:avLst/>
@@ -8147,7 +8147,7 @@
                 <a:ea typeface="Calibri" pitchFamily="34" charset="-122"/>
                 <a:cs typeface="Calibri" pitchFamily="34" charset="-120"/>
               </a:rPr>
-              <a:t>Passo 1 compilato, pronto per procedere</a:t>
+              <a:t>Passo 1 (solo accesso diretto), pronto per procedere</a:t>
             </a:r>
             <a:endParaRPr lang="en-US" sz="1050" dirty="0"/>
           </a:p>
@@ -8394,7 +8394,7 @@
                 <a:ea typeface="Cambria" pitchFamily="34" charset="-122"/>
                 <a:cs typeface="Cambria" pitchFamily="34" charset="-120"/>
               </a:rPr>
-              <a:t>Il Progetto</a:t>
+              <a:t>Il Caso Studio</a:t>
             </a:r>
             <a:endParaRPr lang="en-US" sz="2500" dirty="0"/>
           </a:p>
@@ -8436,7 +8436,7 @@
                 <a:ea typeface="Calibri" pitchFamily="34" charset="-122"/>
                 <a:cs typeface="Calibri" pitchFamily="34" charset="-120"/>
               </a:rPr>
-              <a:t>Il cuore della consegna: cosa avete progettato e perché.</a:t>
+              <a:t>Il cuore della consegna: quale caso studio avete scelto e perché.</a:t>
             </a:r>
             <a:endParaRPr lang="en-US" sz="1300" dirty="0"/>
           </a:p>
@@ -8479,7 +8479,7 @@
                 <a:ea typeface="Calibri" pitchFamily="34" charset="-122"/>
                 <a:cs typeface="Calibri" pitchFamily="34" charset="-120"/>
               </a:rPr>
-              <a:t>Titolo del Progetto: breve e riconoscibile.</a:t>
+              <a:t>Titolo del Caso Studio: breve e riconoscibile.</a:t>
             </a:r>
             <a:endParaRPr lang="en-US" sz="1350" dirty="0"/>
           </a:p>
@@ -8500,7 +8500,7 @@
                 <a:ea typeface="Calibri" pitchFamily="34" charset="-122"/>
                 <a:cs typeface="Calibri" pitchFamily="34" charset="-120"/>
               </a:rPr>
-              <a:t>Immagine di Copertina: un’immagine rappresentativa del progetto (facoltativa, ma consigliata).</a:t>
+              <a:t>Immagine di Riferimento: un’immagine rappresentativa del caso studio (facoltativa, ma consigliata).</a:t>
             </a:r>
             <a:endParaRPr lang="en-US" sz="1350" dirty="0"/>
           </a:p>
@@ -8521,7 +8521,7 @@
                 <a:ea typeface="Calibri" pitchFamily="34" charset="-122"/>
                 <a:cs typeface="Calibri" pitchFamily="34" charset="-120"/>
               </a:rPr>
-              <a:t>Descrizione: raccontate il progetto con le vostre parole — questo testo sarà visibile a docente e compagni.</a:t>
+              <a:t>Descrizione Critica: analizzate il caso studio con le vostre parole — contesto, leve di cambiamento, valore generato. Sarà visibile a docente e compagni.</a:t>
             </a:r>
             <a:endParaRPr lang="en-US" sz="1350" dirty="0"/>
           </a:p>
@@ -8535,8 +8535,8 @@
         </p:nvSpPr>
         <p:spPr>
           <a:xfrm>
-            <a:off x="6988065" y="630936"/>
-            <a:ext cx="3946109" cy="5458968"/>
+            <a:off x="6773226" y="630936"/>
+            <a:ext cx="4375789" cy="5458968"/>
           </a:xfrm>
           <a:prstGeom prst="roundRect">
             <a:avLst>
@@ -8577,8 +8577,8 @@
         </p:blipFill>
         <p:spPr>
           <a:xfrm>
-            <a:off x="7042929" y="685800"/>
-            <a:ext cx="3836381" cy="5349240"/>
+            <a:off x="6828090" y="685800"/>
+            <a:ext cx="4266061" cy="5349240"/>
           </a:xfrm>
           <a:prstGeom prst="rect">
             <a:avLst/>
@@ -8618,7 +8618,7 @@
                 <a:ea typeface="Calibri" pitchFamily="34" charset="-122"/>
                 <a:cs typeface="Calibri" pitchFamily="34" charset="-120"/>
               </a:rPr>
-              <a:t>Titolo, immagine e descrizione compilati</a:t>
+              <a:t>Titolo, immagine e descrizione critica compilati</a:t>
             </a:r>
             <a:endParaRPr lang="en-US" sz="1050" dirty="0"/>
           </a:p>
@@ -8907,7 +8907,7 @@
                 <a:ea typeface="Calibri" pitchFamily="34" charset="-122"/>
                 <a:cs typeface="Calibri" pitchFamily="34" charset="-120"/>
               </a:rPr>
-              <a:t>A quali temi si collega il vostro progetto?</a:t>
+              <a:t>A quali temi si collega il caso studio?</a:t>
             </a:r>
             <a:endParaRPr lang="en-US" sz="1300" dirty="0"/>
           </a:p>
@@ -8950,7 +8950,7 @@
                 <a:ea typeface="Calibri" pitchFamily="34" charset="-122"/>
                 <a:cs typeface="Calibri" pitchFamily="34" charset="-120"/>
               </a:rPr>
-              <a:t>Selezionate quanti tag pertinenti servono dall’elenco proposto.</a:t>
+              <a:t>Assegnate le tag che ritenete opportune dall’elenco proposto.</a:t>
             </a:r>
             <a:endParaRPr lang="en-US" sz="1350" dirty="0"/>
           </a:p>
@@ -8971,7 +8971,7 @@
                 <a:ea typeface="Calibri" pitchFamily="34" charset="-122"/>
                 <a:cs typeface="Calibri" pitchFamily="34" charset="-120"/>
               </a:rPr>
-              <a:t>Se il vostro tema non è in elenco, potete aggiungerne uno personalizzato nel campo “Altro”.</a:t>
+              <a:t>Se non trovate un tema adatto, aggiungetene uno vostro nel campo “Altro”.</a:t>
             </a:r>
             <a:endParaRPr lang="en-US" sz="1350" dirty="0"/>
           </a:p>
@@ -8992,7 +8992,7 @@
                 <a:ea typeface="Calibri" pitchFamily="34" charset="-122"/>
                 <a:cs typeface="Calibri" pitchFamily="34" charset="-120"/>
               </a:rPr>
-              <a:t>I tag aiutano il/la docente a filtrare e confrontare i progetti nella Matrice Globale.</a:t>
+              <a:t>I tag aiutano il/la docente a filtrare e confrontare i casi studio nella Matrice Globale.</a:t>
             </a:r>
             <a:endParaRPr lang="en-US" sz="1350" dirty="0"/>
           </a:p>
@@ -9006,8 +9006,8 @@
         </p:nvSpPr>
         <p:spPr>
           <a:xfrm>
-            <a:off x="6909206" y="630936"/>
-            <a:ext cx="4103827" cy="5458968"/>
+            <a:off x="6306256" y="756337"/>
+            <a:ext cx="5309728" cy="5208166"/>
           </a:xfrm>
           <a:prstGeom prst="roundRect">
             <a:avLst>
@@ -9048,8 +9048,8 @@
         </p:blipFill>
         <p:spPr>
           <a:xfrm>
-            <a:off x="6964070" y="685800"/>
-            <a:ext cx="3994099" cy="5349240"/>
+            <a:off x="6361120" y="811201"/>
+            <a:ext cx="5200000" cy="5098438"/>
           </a:xfrm>
           <a:prstGeom prst="rect">
             <a:avLst/>
@@ -9378,7 +9378,7 @@
                 <a:ea typeface="Calibri" pitchFamily="34" charset="-122"/>
                 <a:cs typeface="Calibri" pitchFamily="34" charset="-120"/>
               </a:rPr>
-              <a:t>Autovalutate il progetto sui 4 driver di innovazione, da 0 a 5.</a:t>
+              <a:t>Ponderate il caso studio sui 4 driver di innovazione, da 0 a 5, aggiungendo un commento per ciascuno.</a:t>
             </a:r>
             <a:endParaRPr lang="en-US" sz="1300" dirty="0"/>
           </a:p>
@@ -9505,7 +9505,7 @@
                 <a:ea typeface="Calibri" pitchFamily="34" charset="-122"/>
                 <a:cs typeface="Calibri" pitchFamily="34" charset="-120"/>
               </a:rPr>
-              <a:t>Per ogni driver, scrivete anche il perché: la motivazione è importante quanto il numero, e sarà letta da chi vi valuta e da chi vota in aula.</a:t>
+              <a:t>Per ogni driver, scrivete anche il perché: il commento è importante quanto il numero, e sarà letto da chi vi valuta e da chi vota in aula.</a:t>
             </a:r>
             <a:endParaRPr lang="en-US" sz="1350" dirty="0"/>
           </a:p>
@@ -9519,8 +9519,8 @@
         </p:nvSpPr>
         <p:spPr>
           <a:xfrm>
-            <a:off x="7536329" y="630936"/>
-            <a:ext cx="2849583" cy="5458968"/>
+            <a:off x="7351292" y="630936"/>
+            <a:ext cx="3219657" cy="5458968"/>
           </a:xfrm>
           <a:prstGeom prst="roundRect">
             <a:avLst>
@@ -9561,8 +9561,8 @@
         </p:blipFill>
         <p:spPr>
           <a:xfrm>
-            <a:off x="7591193" y="685800"/>
-            <a:ext cx="2739855" cy="5349240"/>
+            <a:off x="7406156" y="685800"/>
+            <a:ext cx="3109929" cy="5349240"/>
           </a:xfrm>
           <a:prstGeom prst="rect">
             <a:avLst/>
@@ -9602,7 +9602,7 @@
                 <a:ea typeface="Calibri" pitchFamily="34" charset="-122"/>
                 <a:cs typeface="Calibri" pitchFamily="34" charset="-120"/>
               </a:rPr>
-              <a:t>Valore e motivazione per ciascun driver</a:t>
+              <a:t>Valore e commento per ciascun driver</a:t>
             </a:r>
             <a:endParaRPr lang="en-US" sz="1050" dirty="0"/>
           </a:p>
@@ -9990,8 +9990,8 @@
         </p:nvSpPr>
         <p:spPr>
           <a:xfrm>
-            <a:off x="7270820" y="630936"/>
-            <a:ext cx="3380601" cy="5458968"/>
+            <a:off x="7077130" y="630936"/>
+            <a:ext cx="3767979" cy="5458968"/>
           </a:xfrm>
           <a:prstGeom prst="roundRect">
             <a:avLst>
@@ -10032,8 +10032,8 @@
         </p:blipFill>
         <p:spPr>
           <a:xfrm>
-            <a:off x="7325684" y="685800"/>
-            <a:ext cx="3270873" cy="5349240"/>
+            <a:off x="7131994" y="685800"/>
+            <a:ext cx="3658251" cy="5349240"/>
           </a:xfrm>
           <a:prstGeom prst="rect">
             <a:avLst/>
